--- a/public/videos/repositories/welfare-job-alert/welfare-job-alert-tech-preview.pptx
+++ b/public/videos/repositories/welfare-job-alert/welfare-job-alert-tech-preview.pptx
@@ -134,7 +134,7 @@
           <p:cNvPr id="2" name="タイトル 1">
             <a:extLst>
               <a:ext uri="{FF2B5EF4-FFF2-40B4-BE49-F238E27FC236}">
-                <a16:creationId xmlns:a16="http://schemas.microsoft.com/office/drawing/2014/main" id="{233995F0-DB8F-4326-4F9E-61FAD87BFECB}"/>
+                <a16:creationId xmlns:a16="http://schemas.microsoft.com/office/drawing/2014/main" id="{2B187B7D-97CC-94D3-2623-6AAA8388D9D6}"/>
               </a:ext>
             </a:extLst>
           </p:cNvPr>
@@ -171,7 +171,7 @@
           <p:cNvPr id="3" name="字幕 2">
             <a:extLst>
               <a:ext uri="{FF2B5EF4-FFF2-40B4-BE49-F238E27FC236}">
-                <a16:creationId xmlns:a16="http://schemas.microsoft.com/office/drawing/2014/main" id="{B98FCF5F-162A-DACB-DD6E-8F27690B8DFE}"/>
+                <a16:creationId xmlns:a16="http://schemas.microsoft.com/office/drawing/2014/main" id="{974BCF9D-1E65-4374-72C6-EAC0382C85E6}"/>
               </a:ext>
             </a:extLst>
           </p:cNvPr>
@@ -241,7 +241,7 @@
           <p:cNvPr id="4" name="日付プレースホルダー 3">
             <a:extLst>
               <a:ext uri="{FF2B5EF4-FFF2-40B4-BE49-F238E27FC236}">
-                <a16:creationId xmlns:a16="http://schemas.microsoft.com/office/drawing/2014/main" id="{BAAB9601-254F-BC0C-908A-4890938D77D0}"/>
+                <a16:creationId xmlns:a16="http://schemas.microsoft.com/office/drawing/2014/main" id="{820B3A8A-5B8F-0954-7206-511E84C0EE95}"/>
               </a:ext>
             </a:extLst>
           </p:cNvPr>
@@ -257,7 +257,7 @@
           <a:bodyPr/>
           <a:lstStyle/>
           <a:p>
-            <a:fld id="{D1E5438B-56ED-4DE5-B772-B2B57FD291AE}" type="datetimeFigureOut">
+            <a:fld id="{36C7B2FE-D70B-4BC5-9974-2C75A00ABC9C}" type="datetimeFigureOut">
               <a:rPr kumimoji="1" lang="ja-JP" altLang="en-US" smtClean="0"/>
               <a:t>2026/7/30</a:t>
             </a:fld>
@@ -270,7 +270,7 @@
           <p:cNvPr id="5" name="フッター プレースホルダー 4">
             <a:extLst>
               <a:ext uri="{FF2B5EF4-FFF2-40B4-BE49-F238E27FC236}">
-                <a16:creationId xmlns:a16="http://schemas.microsoft.com/office/drawing/2014/main" id="{805105BD-94CE-BCA1-025A-F4CB4D96E264}"/>
+                <a16:creationId xmlns:a16="http://schemas.microsoft.com/office/drawing/2014/main" id="{A67CAD42-00DB-DE81-FE7C-485A8103590D}"/>
               </a:ext>
             </a:extLst>
           </p:cNvPr>
@@ -295,7 +295,7 @@
           <p:cNvPr id="6" name="スライド番号プレースホルダー 5">
             <a:extLst>
               <a:ext uri="{FF2B5EF4-FFF2-40B4-BE49-F238E27FC236}">
-                <a16:creationId xmlns:a16="http://schemas.microsoft.com/office/drawing/2014/main" id="{8678A486-5E7B-A8C2-363D-BB45BBEA432F}"/>
+                <a16:creationId xmlns:a16="http://schemas.microsoft.com/office/drawing/2014/main" id="{41DB3ABD-AF5D-EFD0-BAA0-B864CEB0ADFB}"/>
               </a:ext>
             </a:extLst>
           </p:cNvPr>
@@ -311,7 +311,7 @@
           <a:bodyPr/>
           <a:lstStyle/>
           <a:p>
-            <a:fld id="{0BCC171E-E0C5-4CC6-9F71-807907E7C7A2}" type="slidenum">
+            <a:fld id="{BA9BFC98-BA7B-49EC-AA94-EA5D68368701}" type="slidenum">
               <a:rPr kumimoji="1" lang="ja-JP" altLang="en-US" smtClean="0"/>
               <a:t>‹#›</a:t>
             </a:fld>
@@ -322,7 +322,7 @@
     </p:spTree>
     <p:extLst>
       <p:ext uri="{BB962C8B-B14F-4D97-AF65-F5344CB8AC3E}">
-        <p14:creationId xmlns:p14="http://schemas.microsoft.com/office/powerpoint/2010/main" val="2425678741"/>
+        <p14:creationId xmlns:p14="http://schemas.microsoft.com/office/powerpoint/2010/main" val="2025644250"/>
       </p:ext>
     </p:extLst>
   </p:cSld>
@@ -354,7 +354,7 @@
           <p:cNvPr id="2" name="タイトル 1">
             <a:extLst>
               <a:ext uri="{FF2B5EF4-FFF2-40B4-BE49-F238E27FC236}">
-                <a16:creationId xmlns:a16="http://schemas.microsoft.com/office/drawing/2014/main" id="{E036B625-EE7A-37CD-9251-0A12672C2D5B}"/>
+                <a16:creationId xmlns:a16="http://schemas.microsoft.com/office/drawing/2014/main" id="{5AABE97B-78DC-7954-765F-636E49E1599F}"/>
               </a:ext>
             </a:extLst>
           </p:cNvPr>
@@ -382,7 +382,7 @@
           <p:cNvPr id="3" name="縦書きテキスト プレースホルダー 2">
             <a:extLst>
               <a:ext uri="{FF2B5EF4-FFF2-40B4-BE49-F238E27FC236}">
-                <a16:creationId xmlns:a16="http://schemas.microsoft.com/office/drawing/2014/main" id="{29F765DD-FD35-8A5F-62DA-C4D3AB7AB435}"/>
+                <a16:creationId xmlns:a16="http://schemas.microsoft.com/office/drawing/2014/main" id="{512980EC-7D4C-ACBC-6039-8541AB376064}"/>
               </a:ext>
             </a:extLst>
           </p:cNvPr>
@@ -471,7 +471,7 @@
           <p:cNvPr id="4" name="日付プレースホルダー 3">
             <a:extLst>
               <a:ext uri="{FF2B5EF4-FFF2-40B4-BE49-F238E27FC236}">
-                <a16:creationId xmlns:a16="http://schemas.microsoft.com/office/drawing/2014/main" id="{69F08537-E2B1-1DD5-A4F9-7FBED0FD7B77}"/>
+                <a16:creationId xmlns:a16="http://schemas.microsoft.com/office/drawing/2014/main" id="{BC2D0FB5-8FB3-207E-0CBD-DE0A42E0C472}"/>
               </a:ext>
             </a:extLst>
           </p:cNvPr>
@@ -487,7 +487,7 @@
           <a:bodyPr/>
           <a:lstStyle/>
           <a:p>
-            <a:fld id="{D1E5438B-56ED-4DE5-B772-B2B57FD291AE}" type="datetimeFigureOut">
+            <a:fld id="{36C7B2FE-D70B-4BC5-9974-2C75A00ABC9C}" type="datetimeFigureOut">
               <a:rPr kumimoji="1" lang="ja-JP" altLang="en-US" smtClean="0"/>
               <a:t>2026/7/30</a:t>
             </a:fld>
@@ -500,7 +500,7 @@
           <p:cNvPr id="5" name="フッター プレースホルダー 4">
             <a:extLst>
               <a:ext uri="{FF2B5EF4-FFF2-40B4-BE49-F238E27FC236}">
-                <a16:creationId xmlns:a16="http://schemas.microsoft.com/office/drawing/2014/main" id="{0FE45C7C-F366-DB98-D7D7-8127DAF9C80D}"/>
+                <a16:creationId xmlns:a16="http://schemas.microsoft.com/office/drawing/2014/main" id="{899BDEF7-CFF7-BF39-2182-E730CC8B380B}"/>
               </a:ext>
             </a:extLst>
           </p:cNvPr>
@@ -525,7 +525,7 @@
           <p:cNvPr id="6" name="スライド番号プレースホルダー 5">
             <a:extLst>
               <a:ext uri="{FF2B5EF4-FFF2-40B4-BE49-F238E27FC236}">
-                <a16:creationId xmlns:a16="http://schemas.microsoft.com/office/drawing/2014/main" id="{3014C84E-55F5-E08A-A5C9-AE707D2E5D07}"/>
+                <a16:creationId xmlns:a16="http://schemas.microsoft.com/office/drawing/2014/main" id="{281BBF66-CFA3-F235-7A36-2A5606EBE578}"/>
               </a:ext>
             </a:extLst>
           </p:cNvPr>
@@ -541,7 +541,7 @@
           <a:bodyPr/>
           <a:lstStyle/>
           <a:p>
-            <a:fld id="{0BCC171E-E0C5-4CC6-9F71-807907E7C7A2}" type="slidenum">
+            <a:fld id="{BA9BFC98-BA7B-49EC-AA94-EA5D68368701}" type="slidenum">
               <a:rPr kumimoji="1" lang="ja-JP" altLang="en-US" smtClean="0"/>
               <a:t>‹#›</a:t>
             </a:fld>
@@ -552,7 +552,7 @@
     </p:spTree>
     <p:extLst>
       <p:ext uri="{BB962C8B-B14F-4D97-AF65-F5344CB8AC3E}">
-        <p14:creationId xmlns:p14="http://schemas.microsoft.com/office/powerpoint/2010/main" val="1139584096"/>
+        <p14:creationId xmlns:p14="http://schemas.microsoft.com/office/powerpoint/2010/main" val="536829176"/>
       </p:ext>
     </p:extLst>
   </p:cSld>
@@ -584,7 +584,7 @@
           <p:cNvPr id="2" name="縦書きタイトル 1">
             <a:extLst>
               <a:ext uri="{FF2B5EF4-FFF2-40B4-BE49-F238E27FC236}">
-                <a16:creationId xmlns:a16="http://schemas.microsoft.com/office/drawing/2014/main" id="{AA5F0252-D996-E371-7997-31EAFFFF80DA}"/>
+                <a16:creationId xmlns:a16="http://schemas.microsoft.com/office/drawing/2014/main" id="{E13829C8-0CA2-FBAA-89B4-77A8DB617F7A}"/>
               </a:ext>
             </a:extLst>
           </p:cNvPr>
@@ -617,7 +617,7 @@
           <p:cNvPr id="3" name="縦書きテキスト プレースホルダー 2">
             <a:extLst>
               <a:ext uri="{FF2B5EF4-FFF2-40B4-BE49-F238E27FC236}">
-                <a16:creationId xmlns:a16="http://schemas.microsoft.com/office/drawing/2014/main" id="{F78D97A0-0F7F-56E6-02BE-3254EF683258}"/>
+                <a16:creationId xmlns:a16="http://schemas.microsoft.com/office/drawing/2014/main" id="{1B42F70A-F41D-6CE0-7C15-FF070546EC21}"/>
               </a:ext>
             </a:extLst>
           </p:cNvPr>
@@ -711,7 +711,7 @@
           <p:cNvPr id="4" name="日付プレースホルダー 3">
             <a:extLst>
               <a:ext uri="{FF2B5EF4-FFF2-40B4-BE49-F238E27FC236}">
-                <a16:creationId xmlns:a16="http://schemas.microsoft.com/office/drawing/2014/main" id="{6C011BAA-101B-589D-117F-874A19462DD0}"/>
+                <a16:creationId xmlns:a16="http://schemas.microsoft.com/office/drawing/2014/main" id="{C279623A-8C69-1831-D517-8325C653CC3A}"/>
               </a:ext>
             </a:extLst>
           </p:cNvPr>
@@ -727,7 +727,7 @@
           <a:bodyPr/>
           <a:lstStyle/>
           <a:p>
-            <a:fld id="{D1E5438B-56ED-4DE5-B772-B2B57FD291AE}" type="datetimeFigureOut">
+            <a:fld id="{36C7B2FE-D70B-4BC5-9974-2C75A00ABC9C}" type="datetimeFigureOut">
               <a:rPr kumimoji="1" lang="ja-JP" altLang="en-US" smtClean="0"/>
               <a:t>2026/7/30</a:t>
             </a:fld>
@@ -740,7 +740,7 @@
           <p:cNvPr id="5" name="フッター プレースホルダー 4">
             <a:extLst>
               <a:ext uri="{FF2B5EF4-FFF2-40B4-BE49-F238E27FC236}">
-                <a16:creationId xmlns:a16="http://schemas.microsoft.com/office/drawing/2014/main" id="{94BDE14E-F831-D92B-5DC5-91A5C55A6259}"/>
+                <a16:creationId xmlns:a16="http://schemas.microsoft.com/office/drawing/2014/main" id="{0B64C1E9-C4C4-31AD-2626-7C1A8330140E}"/>
               </a:ext>
             </a:extLst>
           </p:cNvPr>
@@ -765,7 +765,7 @@
           <p:cNvPr id="6" name="スライド番号プレースホルダー 5">
             <a:extLst>
               <a:ext uri="{FF2B5EF4-FFF2-40B4-BE49-F238E27FC236}">
-                <a16:creationId xmlns:a16="http://schemas.microsoft.com/office/drawing/2014/main" id="{34A1FAA4-A097-3EB6-0F5E-C30E97F0FF3D}"/>
+                <a16:creationId xmlns:a16="http://schemas.microsoft.com/office/drawing/2014/main" id="{38B2AC7A-61CB-BB8E-2666-66E243268F4A}"/>
               </a:ext>
             </a:extLst>
           </p:cNvPr>
@@ -781,7 +781,7 @@
           <a:bodyPr/>
           <a:lstStyle/>
           <a:p>
-            <a:fld id="{0BCC171E-E0C5-4CC6-9F71-807907E7C7A2}" type="slidenum">
+            <a:fld id="{BA9BFC98-BA7B-49EC-AA94-EA5D68368701}" type="slidenum">
               <a:rPr kumimoji="1" lang="ja-JP" altLang="en-US" smtClean="0"/>
               <a:t>‹#›</a:t>
             </a:fld>
@@ -792,7 +792,7 @@
     </p:spTree>
     <p:extLst>
       <p:ext uri="{BB962C8B-B14F-4D97-AF65-F5344CB8AC3E}">
-        <p14:creationId xmlns:p14="http://schemas.microsoft.com/office/powerpoint/2010/main" val="2738184430"/>
+        <p14:creationId xmlns:p14="http://schemas.microsoft.com/office/powerpoint/2010/main" val="1948255704"/>
       </p:ext>
     </p:extLst>
   </p:cSld>
@@ -824,7 +824,7 @@
           <p:cNvPr id="2" name="タイトル 1">
             <a:extLst>
               <a:ext uri="{FF2B5EF4-FFF2-40B4-BE49-F238E27FC236}">
-                <a16:creationId xmlns:a16="http://schemas.microsoft.com/office/drawing/2014/main" id="{585E8706-9649-8AFF-1196-ABBC186205E8}"/>
+                <a16:creationId xmlns:a16="http://schemas.microsoft.com/office/drawing/2014/main" id="{00DD8E27-7458-F517-B679-BAAAD0009E5B}"/>
               </a:ext>
             </a:extLst>
           </p:cNvPr>
@@ -852,7 +852,7 @@
           <p:cNvPr id="3" name="コンテンツ プレースホルダー 2">
             <a:extLst>
               <a:ext uri="{FF2B5EF4-FFF2-40B4-BE49-F238E27FC236}">
-                <a16:creationId xmlns:a16="http://schemas.microsoft.com/office/drawing/2014/main" id="{145C4DEF-51A6-EB43-0790-E21391CAC12E}"/>
+                <a16:creationId xmlns:a16="http://schemas.microsoft.com/office/drawing/2014/main" id="{7E3C799F-9084-0425-9CA3-EDA919034169}"/>
               </a:ext>
             </a:extLst>
           </p:cNvPr>
@@ -941,7 +941,7 @@
           <p:cNvPr id="4" name="日付プレースホルダー 3">
             <a:extLst>
               <a:ext uri="{FF2B5EF4-FFF2-40B4-BE49-F238E27FC236}">
-                <a16:creationId xmlns:a16="http://schemas.microsoft.com/office/drawing/2014/main" id="{A78EBB80-4584-9184-C7A4-4391229EA3C4}"/>
+                <a16:creationId xmlns:a16="http://schemas.microsoft.com/office/drawing/2014/main" id="{27C3699F-54CA-4B8E-310C-869E4F2C7756}"/>
               </a:ext>
             </a:extLst>
           </p:cNvPr>
@@ -957,7 +957,7 @@
           <a:bodyPr/>
           <a:lstStyle/>
           <a:p>
-            <a:fld id="{D1E5438B-56ED-4DE5-B772-B2B57FD291AE}" type="datetimeFigureOut">
+            <a:fld id="{36C7B2FE-D70B-4BC5-9974-2C75A00ABC9C}" type="datetimeFigureOut">
               <a:rPr kumimoji="1" lang="ja-JP" altLang="en-US" smtClean="0"/>
               <a:t>2026/7/30</a:t>
             </a:fld>
@@ -970,7 +970,7 @@
           <p:cNvPr id="5" name="フッター プレースホルダー 4">
             <a:extLst>
               <a:ext uri="{FF2B5EF4-FFF2-40B4-BE49-F238E27FC236}">
-                <a16:creationId xmlns:a16="http://schemas.microsoft.com/office/drawing/2014/main" id="{2F9DBAD7-8805-04ED-2845-6F832BE4C444}"/>
+                <a16:creationId xmlns:a16="http://schemas.microsoft.com/office/drawing/2014/main" id="{44EF0632-AE82-07B4-E9A2-9BE896A94EF0}"/>
               </a:ext>
             </a:extLst>
           </p:cNvPr>
@@ -995,7 +995,7 @@
           <p:cNvPr id="6" name="スライド番号プレースホルダー 5">
             <a:extLst>
               <a:ext uri="{FF2B5EF4-FFF2-40B4-BE49-F238E27FC236}">
-                <a16:creationId xmlns:a16="http://schemas.microsoft.com/office/drawing/2014/main" id="{8CDA3CA9-EAF2-46B2-4080-DCE23EA3E9F0}"/>
+                <a16:creationId xmlns:a16="http://schemas.microsoft.com/office/drawing/2014/main" id="{59CF2EE7-B89A-9C33-9C0A-972DC59DD461}"/>
               </a:ext>
             </a:extLst>
           </p:cNvPr>
@@ -1011,7 +1011,7 @@
           <a:bodyPr/>
           <a:lstStyle/>
           <a:p>
-            <a:fld id="{0BCC171E-E0C5-4CC6-9F71-807907E7C7A2}" type="slidenum">
+            <a:fld id="{BA9BFC98-BA7B-49EC-AA94-EA5D68368701}" type="slidenum">
               <a:rPr kumimoji="1" lang="ja-JP" altLang="en-US" smtClean="0"/>
               <a:t>‹#›</a:t>
             </a:fld>
@@ -1022,7 +1022,7 @@
     </p:spTree>
     <p:extLst>
       <p:ext uri="{BB962C8B-B14F-4D97-AF65-F5344CB8AC3E}">
-        <p14:creationId xmlns:p14="http://schemas.microsoft.com/office/powerpoint/2010/main" val="399171025"/>
+        <p14:creationId xmlns:p14="http://schemas.microsoft.com/office/powerpoint/2010/main" val="3286731162"/>
       </p:ext>
     </p:extLst>
   </p:cSld>
@@ -1054,7 +1054,7 @@
           <p:cNvPr id="2" name="タイトル 1">
             <a:extLst>
               <a:ext uri="{FF2B5EF4-FFF2-40B4-BE49-F238E27FC236}">
-                <a16:creationId xmlns:a16="http://schemas.microsoft.com/office/drawing/2014/main" id="{9BAAD846-9DD7-2328-B8D6-FCA0AAB49F40}"/>
+                <a16:creationId xmlns:a16="http://schemas.microsoft.com/office/drawing/2014/main" id="{062245B0-DDFF-4ED9-855D-C8D0CAC386B2}"/>
               </a:ext>
             </a:extLst>
           </p:cNvPr>
@@ -1091,7 +1091,7 @@
           <p:cNvPr id="3" name="テキスト プレースホルダー 2">
             <a:extLst>
               <a:ext uri="{FF2B5EF4-FFF2-40B4-BE49-F238E27FC236}">
-                <a16:creationId xmlns:a16="http://schemas.microsoft.com/office/drawing/2014/main" id="{DA5C3CCC-23CF-DC45-350C-5F08222E0366}"/>
+                <a16:creationId xmlns:a16="http://schemas.microsoft.com/office/drawing/2014/main" id="{0C0EB86D-E151-56CB-7F05-D04813220A80}"/>
               </a:ext>
             </a:extLst>
           </p:cNvPr>
@@ -1216,7 +1216,7 @@
           <p:cNvPr id="4" name="日付プレースホルダー 3">
             <a:extLst>
               <a:ext uri="{FF2B5EF4-FFF2-40B4-BE49-F238E27FC236}">
-                <a16:creationId xmlns:a16="http://schemas.microsoft.com/office/drawing/2014/main" id="{AB1F12BF-2FFA-098C-C350-87BDC6B1B883}"/>
+                <a16:creationId xmlns:a16="http://schemas.microsoft.com/office/drawing/2014/main" id="{23DACA7E-F96F-9112-3692-4810308FDBFF}"/>
               </a:ext>
             </a:extLst>
           </p:cNvPr>
@@ -1232,7 +1232,7 @@
           <a:bodyPr/>
           <a:lstStyle/>
           <a:p>
-            <a:fld id="{D1E5438B-56ED-4DE5-B772-B2B57FD291AE}" type="datetimeFigureOut">
+            <a:fld id="{36C7B2FE-D70B-4BC5-9974-2C75A00ABC9C}" type="datetimeFigureOut">
               <a:rPr kumimoji="1" lang="ja-JP" altLang="en-US" smtClean="0"/>
               <a:t>2026/7/30</a:t>
             </a:fld>
@@ -1245,7 +1245,7 @@
           <p:cNvPr id="5" name="フッター プレースホルダー 4">
             <a:extLst>
               <a:ext uri="{FF2B5EF4-FFF2-40B4-BE49-F238E27FC236}">
-                <a16:creationId xmlns:a16="http://schemas.microsoft.com/office/drawing/2014/main" id="{15A5A47A-3107-13EC-2974-2A01C694FC90}"/>
+                <a16:creationId xmlns:a16="http://schemas.microsoft.com/office/drawing/2014/main" id="{A4445206-4106-D71A-E8D8-085B3CC1D093}"/>
               </a:ext>
             </a:extLst>
           </p:cNvPr>
@@ -1270,7 +1270,7 @@
           <p:cNvPr id="6" name="スライド番号プレースホルダー 5">
             <a:extLst>
               <a:ext uri="{FF2B5EF4-FFF2-40B4-BE49-F238E27FC236}">
-                <a16:creationId xmlns:a16="http://schemas.microsoft.com/office/drawing/2014/main" id="{34A93EE4-1CA2-49D8-1AFF-1F348173D1A6}"/>
+                <a16:creationId xmlns:a16="http://schemas.microsoft.com/office/drawing/2014/main" id="{3269FED4-A806-E538-5230-AEE2E9FE1851}"/>
               </a:ext>
             </a:extLst>
           </p:cNvPr>
@@ -1286,7 +1286,7 @@
           <a:bodyPr/>
           <a:lstStyle/>
           <a:p>
-            <a:fld id="{0BCC171E-E0C5-4CC6-9F71-807907E7C7A2}" type="slidenum">
+            <a:fld id="{BA9BFC98-BA7B-49EC-AA94-EA5D68368701}" type="slidenum">
               <a:rPr kumimoji="1" lang="ja-JP" altLang="en-US" smtClean="0"/>
               <a:t>‹#›</a:t>
             </a:fld>
@@ -1297,7 +1297,7 @@
     </p:spTree>
     <p:extLst>
       <p:ext uri="{BB962C8B-B14F-4D97-AF65-F5344CB8AC3E}">
-        <p14:creationId xmlns:p14="http://schemas.microsoft.com/office/powerpoint/2010/main" val="1568110161"/>
+        <p14:creationId xmlns:p14="http://schemas.microsoft.com/office/powerpoint/2010/main" val="2179157896"/>
       </p:ext>
     </p:extLst>
   </p:cSld>
@@ -1329,7 +1329,7 @@
           <p:cNvPr id="2" name="タイトル 1">
             <a:extLst>
               <a:ext uri="{FF2B5EF4-FFF2-40B4-BE49-F238E27FC236}">
-                <a16:creationId xmlns:a16="http://schemas.microsoft.com/office/drawing/2014/main" id="{16BC68CD-534B-1BA8-ACCB-40E1306C0E25}"/>
+                <a16:creationId xmlns:a16="http://schemas.microsoft.com/office/drawing/2014/main" id="{65F52847-9D60-F101-0684-25A40587D832}"/>
               </a:ext>
             </a:extLst>
           </p:cNvPr>
@@ -1357,7 +1357,7 @@
           <p:cNvPr id="3" name="コンテンツ プレースホルダー 2">
             <a:extLst>
               <a:ext uri="{FF2B5EF4-FFF2-40B4-BE49-F238E27FC236}">
-                <a16:creationId xmlns:a16="http://schemas.microsoft.com/office/drawing/2014/main" id="{CAC0B7E9-9EF0-296C-C85F-C4121AE5B84D}"/>
+                <a16:creationId xmlns:a16="http://schemas.microsoft.com/office/drawing/2014/main" id="{0C4B131C-A943-7330-E49F-4035151BD3BE}"/>
               </a:ext>
             </a:extLst>
           </p:cNvPr>
@@ -1451,7 +1451,7 @@
           <p:cNvPr id="4" name="コンテンツ プレースホルダー 3">
             <a:extLst>
               <a:ext uri="{FF2B5EF4-FFF2-40B4-BE49-F238E27FC236}">
-                <a16:creationId xmlns:a16="http://schemas.microsoft.com/office/drawing/2014/main" id="{71582B22-6AB2-A0A7-12D4-A53C4C3B56DA}"/>
+                <a16:creationId xmlns:a16="http://schemas.microsoft.com/office/drawing/2014/main" id="{74DC9653-6860-451F-E3AE-FDF8B117C758}"/>
               </a:ext>
             </a:extLst>
           </p:cNvPr>
@@ -1545,7 +1545,7 @@
           <p:cNvPr id="5" name="日付プレースホルダー 4">
             <a:extLst>
               <a:ext uri="{FF2B5EF4-FFF2-40B4-BE49-F238E27FC236}">
-                <a16:creationId xmlns:a16="http://schemas.microsoft.com/office/drawing/2014/main" id="{6DBF4889-3D91-524A-2181-3D1EF64B9A6A}"/>
+                <a16:creationId xmlns:a16="http://schemas.microsoft.com/office/drawing/2014/main" id="{AC3EBDDD-95ED-2BA5-7329-E4385D4C684D}"/>
               </a:ext>
             </a:extLst>
           </p:cNvPr>
@@ -1561,7 +1561,7 @@
           <a:bodyPr/>
           <a:lstStyle/>
           <a:p>
-            <a:fld id="{D1E5438B-56ED-4DE5-B772-B2B57FD291AE}" type="datetimeFigureOut">
+            <a:fld id="{36C7B2FE-D70B-4BC5-9974-2C75A00ABC9C}" type="datetimeFigureOut">
               <a:rPr kumimoji="1" lang="ja-JP" altLang="en-US" smtClean="0"/>
               <a:t>2026/7/30</a:t>
             </a:fld>
@@ -1574,7 +1574,7 @@
           <p:cNvPr id="6" name="フッター プレースホルダー 5">
             <a:extLst>
               <a:ext uri="{FF2B5EF4-FFF2-40B4-BE49-F238E27FC236}">
-                <a16:creationId xmlns:a16="http://schemas.microsoft.com/office/drawing/2014/main" id="{4A99FC4E-196E-6A3D-2200-2A9B75CC0915}"/>
+                <a16:creationId xmlns:a16="http://schemas.microsoft.com/office/drawing/2014/main" id="{6826E551-F620-36A0-94EA-2451D994EE4D}"/>
               </a:ext>
             </a:extLst>
           </p:cNvPr>
@@ -1599,7 +1599,7 @@
           <p:cNvPr id="7" name="スライド番号プレースホルダー 6">
             <a:extLst>
               <a:ext uri="{FF2B5EF4-FFF2-40B4-BE49-F238E27FC236}">
-                <a16:creationId xmlns:a16="http://schemas.microsoft.com/office/drawing/2014/main" id="{8937B868-4560-7EF6-715C-68BF9F9D3E84}"/>
+                <a16:creationId xmlns:a16="http://schemas.microsoft.com/office/drawing/2014/main" id="{F3F7E22A-78EC-FBE5-CC4B-B3E74B0C5E7A}"/>
               </a:ext>
             </a:extLst>
           </p:cNvPr>
@@ -1615,7 +1615,7 @@
           <a:bodyPr/>
           <a:lstStyle/>
           <a:p>
-            <a:fld id="{0BCC171E-E0C5-4CC6-9F71-807907E7C7A2}" type="slidenum">
+            <a:fld id="{BA9BFC98-BA7B-49EC-AA94-EA5D68368701}" type="slidenum">
               <a:rPr kumimoji="1" lang="ja-JP" altLang="en-US" smtClean="0"/>
               <a:t>‹#›</a:t>
             </a:fld>
@@ -1626,7 +1626,7 @@
     </p:spTree>
     <p:extLst>
       <p:ext uri="{BB962C8B-B14F-4D97-AF65-F5344CB8AC3E}">
-        <p14:creationId xmlns:p14="http://schemas.microsoft.com/office/powerpoint/2010/main" val="3646073604"/>
+        <p14:creationId xmlns:p14="http://schemas.microsoft.com/office/powerpoint/2010/main" val="346178898"/>
       </p:ext>
     </p:extLst>
   </p:cSld>
@@ -1658,7 +1658,7 @@
           <p:cNvPr id="2" name="タイトル 1">
             <a:extLst>
               <a:ext uri="{FF2B5EF4-FFF2-40B4-BE49-F238E27FC236}">
-                <a16:creationId xmlns:a16="http://schemas.microsoft.com/office/drawing/2014/main" id="{92C1812D-F65E-AC0C-BCE0-EB4163078995}"/>
+                <a16:creationId xmlns:a16="http://schemas.microsoft.com/office/drawing/2014/main" id="{9CA3EE31-FB44-17EC-0D76-A2F3FE74E506}"/>
               </a:ext>
             </a:extLst>
           </p:cNvPr>
@@ -1691,7 +1691,7 @@
           <p:cNvPr id="3" name="テキスト プレースホルダー 2">
             <a:extLst>
               <a:ext uri="{FF2B5EF4-FFF2-40B4-BE49-F238E27FC236}">
-                <a16:creationId xmlns:a16="http://schemas.microsoft.com/office/drawing/2014/main" id="{EFCDD4D4-102F-176F-2EA3-85F3E3D6080A}"/>
+                <a16:creationId xmlns:a16="http://schemas.microsoft.com/office/drawing/2014/main" id="{6E2FBBB9-2E7D-6063-3A0B-87F08B79E00A}"/>
               </a:ext>
             </a:extLst>
           </p:cNvPr>
@@ -1762,7 +1762,7 @@
           <p:cNvPr id="4" name="コンテンツ プレースホルダー 3">
             <a:extLst>
               <a:ext uri="{FF2B5EF4-FFF2-40B4-BE49-F238E27FC236}">
-                <a16:creationId xmlns:a16="http://schemas.microsoft.com/office/drawing/2014/main" id="{0CA617F7-8D36-A8E7-9D60-597096741EC5}"/>
+                <a16:creationId xmlns:a16="http://schemas.microsoft.com/office/drawing/2014/main" id="{0864FC66-FD57-B6DD-101A-DE83ACA13D29}"/>
               </a:ext>
             </a:extLst>
           </p:cNvPr>
@@ -1856,7 +1856,7 @@
           <p:cNvPr id="5" name="テキスト プレースホルダー 4">
             <a:extLst>
               <a:ext uri="{FF2B5EF4-FFF2-40B4-BE49-F238E27FC236}">
-                <a16:creationId xmlns:a16="http://schemas.microsoft.com/office/drawing/2014/main" id="{03D91C85-3357-257D-8CF3-5EF75697F04E}"/>
+                <a16:creationId xmlns:a16="http://schemas.microsoft.com/office/drawing/2014/main" id="{01B880BA-9F48-935A-F5C3-1981EF8D616C}"/>
               </a:ext>
             </a:extLst>
           </p:cNvPr>
@@ -1927,7 +1927,7 @@
           <p:cNvPr id="6" name="コンテンツ プレースホルダー 5">
             <a:extLst>
               <a:ext uri="{FF2B5EF4-FFF2-40B4-BE49-F238E27FC236}">
-                <a16:creationId xmlns:a16="http://schemas.microsoft.com/office/drawing/2014/main" id="{8D82C485-6B24-6A2F-8EAC-A4821C352E29}"/>
+                <a16:creationId xmlns:a16="http://schemas.microsoft.com/office/drawing/2014/main" id="{97BCF398-EDE7-1B80-4162-9A0EE4398E1A}"/>
               </a:ext>
             </a:extLst>
           </p:cNvPr>
@@ -2021,7 +2021,7 @@
           <p:cNvPr id="7" name="日付プレースホルダー 6">
             <a:extLst>
               <a:ext uri="{FF2B5EF4-FFF2-40B4-BE49-F238E27FC236}">
-                <a16:creationId xmlns:a16="http://schemas.microsoft.com/office/drawing/2014/main" id="{DE4CCB31-D06B-512D-3488-DD4A36ECA6D8}"/>
+                <a16:creationId xmlns:a16="http://schemas.microsoft.com/office/drawing/2014/main" id="{F18D9A80-007D-B45A-B378-FA3F0403C266}"/>
               </a:ext>
             </a:extLst>
           </p:cNvPr>
@@ -2037,7 +2037,7 @@
           <a:bodyPr/>
           <a:lstStyle/>
           <a:p>
-            <a:fld id="{D1E5438B-56ED-4DE5-B772-B2B57FD291AE}" type="datetimeFigureOut">
+            <a:fld id="{36C7B2FE-D70B-4BC5-9974-2C75A00ABC9C}" type="datetimeFigureOut">
               <a:rPr kumimoji="1" lang="ja-JP" altLang="en-US" smtClean="0"/>
               <a:t>2026/7/30</a:t>
             </a:fld>
@@ -2050,7 +2050,7 @@
           <p:cNvPr id="8" name="フッター プレースホルダー 7">
             <a:extLst>
               <a:ext uri="{FF2B5EF4-FFF2-40B4-BE49-F238E27FC236}">
-                <a16:creationId xmlns:a16="http://schemas.microsoft.com/office/drawing/2014/main" id="{09591094-F011-FB21-C6A4-49989A209720}"/>
+                <a16:creationId xmlns:a16="http://schemas.microsoft.com/office/drawing/2014/main" id="{C3702D31-51F2-0438-2D49-9F4B89578130}"/>
               </a:ext>
             </a:extLst>
           </p:cNvPr>
@@ -2075,7 +2075,7 @@
           <p:cNvPr id="9" name="スライド番号プレースホルダー 8">
             <a:extLst>
               <a:ext uri="{FF2B5EF4-FFF2-40B4-BE49-F238E27FC236}">
-                <a16:creationId xmlns:a16="http://schemas.microsoft.com/office/drawing/2014/main" id="{5868FFE8-D130-5F51-066F-489CF40F9884}"/>
+                <a16:creationId xmlns:a16="http://schemas.microsoft.com/office/drawing/2014/main" id="{6AB650AB-897D-2761-CDC4-3940FD171F92}"/>
               </a:ext>
             </a:extLst>
           </p:cNvPr>
@@ -2091,7 +2091,7 @@
           <a:bodyPr/>
           <a:lstStyle/>
           <a:p>
-            <a:fld id="{0BCC171E-E0C5-4CC6-9F71-807907E7C7A2}" type="slidenum">
+            <a:fld id="{BA9BFC98-BA7B-49EC-AA94-EA5D68368701}" type="slidenum">
               <a:rPr kumimoji="1" lang="ja-JP" altLang="en-US" smtClean="0"/>
               <a:t>‹#›</a:t>
             </a:fld>
@@ -2102,7 +2102,7 @@
     </p:spTree>
     <p:extLst>
       <p:ext uri="{BB962C8B-B14F-4D97-AF65-F5344CB8AC3E}">
-        <p14:creationId xmlns:p14="http://schemas.microsoft.com/office/powerpoint/2010/main" val="1192201856"/>
+        <p14:creationId xmlns:p14="http://schemas.microsoft.com/office/powerpoint/2010/main" val="2350384565"/>
       </p:ext>
     </p:extLst>
   </p:cSld>
@@ -2134,7 +2134,7 @@
           <p:cNvPr id="2" name="タイトル 1">
             <a:extLst>
               <a:ext uri="{FF2B5EF4-FFF2-40B4-BE49-F238E27FC236}">
-                <a16:creationId xmlns:a16="http://schemas.microsoft.com/office/drawing/2014/main" id="{72A2CD8E-FFB4-E7F1-81A2-20E92F24001C}"/>
+                <a16:creationId xmlns:a16="http://schemas.microsoft.com/office/drawing/2014/main" id="{79355744-7396-546E-9991-B91D7875B63E}"/>
               </a:ext>
             </a:extLst>
           </p:cNvPr>
@@ -2162,7 +2162,7 @@
           <p:cNvPr id="3" name="日付プレースホルダー 2">
             <a:extLst>
               <a:ext uri="{FF2B5EF4-FFF2-40B4-BE49-F238E27FC236}">
-                <a16:creationId xmlns:a16="http://schemas.microsoft.com/office/drawing/2014/main" id="{73B7CA3B-FB65-8C62-5774-ACC8FF2222C5}"/>
+                <a16:creationId xmlns:a16="http://schemas.microsoft.com/office/drawing/2014/main" id="{99FC17D5-DB71-851F-C3FF-9BEF0A5721DF}"/>
               </a:ext>
             </a:extLst>
           </p:cNvPr>
@@ -2178,7 +2178,7 @@
           <a:bodyPr/>
           <a:lstStyle/>
           <a:p>
-            <a:fld id="{D1E5438B-56ED-4DE5-B772-B2B57FD291AE}" type="datetimeFigureOut">
+            <a:fld id="{36C7B2FE-D70B-4BC5-9974-2C75A00ABC9C}" type="datetimeFigureOut">
               <a:rPr kumimoji="1" lang="ja-JP" altLang="en-US" smtClean="0"/>
               <a:t>2026/7/30</a:t>
             </a:fld>
@@ -2191,7 +2191,7 @@
           <p:cNvPr id="4" name="フッター プレースホルダー 3">
             <a:extLst>
               <a:ext uri="{FF2B5EF4-FFF2-40B4-BE49-F238E27FC236}">
-                <a16:creationId xmlns:a16="http://schemas.microsoft.com/office/drawing/2014/main" id="{9EFE15D7-33F4-15B2-3FC0-95C6BEED4298}"/>
+                <a16:creationId xmlns:a16="http://schemas.microsoft.com/office/drawing/2014/main" id="{1E6B3F24-0EF8-0716-B85F-7DB71CEA4E7A}"/>
               </a:ext>
             </a:extLst>
           </p:cNvPr>
@@ -2216,7 +2216,7 @@
           <p:cNvPr id="5" name="スライド番号プレースホルダー 4">
             <a:extLst>
               <a:ext uri="{FF2B5EF4-FFF2-40B4-BE49-F238E27FC236}">
-                <a16:creationId xmlns:a16="http://schemas.microsoft.com/office/drawing/2014/main" id="{C3A601B2-6491-C7B7-2AD5-2E309E90C58F}"/>
+                <a16:creationId xmlns:a16="http://schemas.microsoft.com/office/drawing/2014/main" id="{045F6990-5D07-44A2-2F87-DA92A1FE2B66}"/>
               </a:ext>
             </a:extLst>
           </p:cNvPr>
@@ -2232,7 +2232,7 @@
           <a:bodyPr/>
           <a:lstStyle/>
           <a:p>
-            <a:fld id="{0BCC171E-E0C5-4CC6-9F71-807907E7C7A2}" type="slidenum">
+            <a:fld id="{BA9BFC98-BA7B-49EC-AA94-EA5D68368701}" type="slidenum">
               <a:rPr kumimoji="1" lang="ja-JP" altLang="en-US" smtClean="0"/>
               <a:t>‹#›</a:t>
             </a:fld>
@@ -2243,7 +2243,7 @@
     </p:spTree>
     <p:extLst>
       <p:ext uri="{BB962C8B-B14F-4D97-AF65-F5344CB8AC3E}">
-        <p14:creationId xmlns:p14="http://schemas.microsoft.com/office/powerpoint/2010/main" val="3547408109"/>
+        <p14:creationId xmlns:p14="http://schemas.microsoft.com/office/powerpoint/2010/main" val="3432270292"/>
       </p:ext>
     </p:extLst>
   </p:cSld>
@@ -2275,7 +2275,7 @@
           <p:cNvPr id="2" name="日付プレースホルダー 1">
             <a:extLst>
               <a:ext uri="{FF2B5EF4-FFF2-40B4-BE49-F238E27FC236}">
-                <a16:creationId xmlns:a16="http://schemas.microsoft.com/office/drawing/2014/main" id="{FCA379CA-69EB-7C7B-172C-4C33DA72B63B}"/>
+                <a16:creationId xmlns:a16="http://schemas.microsoft.com/office/drawing/2014/main" id="{554AE2BE-C7B7-89FE-E941-327163092667}"/>
               </a:ext>
             </a:extLst>
           </p:cNvPr>
@@ -2291,7 +2291,7 @@
           <a:bodyPr/>
           <a:lstStyle/>
           <a:p>
-            <a:fld id="{D1E5438B-56ED-4DE5-B772-B2B57FD291AE}" type="datetimeFigureOut">
+            <a:fld id="{36C7B2FE-D70B-4BC5-9974-2C75A00ABC9C}" type="datetimeFigureOut">
               <a:rPr kumimoji="1" lang="ja-JP" altLang="en-US" smtClean="0"/>
               <a:t>2026/7/30</a:t>
             </a:fld>
@@ -2304,7 +2304,7 @@
           <p:cNvPr id="3" name="フッター プレースホルダー 2">
             <a:extLst>
               <a:ext uri="{FF2B5EF4-FFF2-40B4-BE49-F238E27FC236}">
-                <a16:creationId xmlns:a16="http://schemas.microsoft.com/office/drawing/2014/main" id="{C1E1CA0E-5A85-CCFA-0783-DA77C3445463}"/>
+                <a16:creationId xmlns:a16="http://schemas.microsoft.com/office/drawing/2014/main" id="{5AF57CA0-5A61-7FEF-B55C-6C65DB69E5A3}"/>
               </a:ext>
             </a:extLst>
           </p:cNvPr>
@@ -2329,7 +2329,7 @@
           <p:cNvPr id="4" name="スライド番号プレースホルダー 3">
             <a:extLst>
               <a:ext uri="{FF2B5EF4-FFF2-40B4-BE49-F238E27FC236}">
-                <a16:creationId xmlns:a16="http://schemas.microsoft.com/office/drawing/2014/main" id="{612C42AE-0834-5075-8BC2-0EF26CE26782}"/>
+                <a16:creationId xmlns:a16="http://schemas.microsoft.com/office/drawing/2014/main" id="{D567C99D-F0DB-0FE5-A781-6DC909AF1BCB}"/>
               </a:ext>
             </a:extLst>
           </p:cNvPr>
@@ -2345,7 +2345,7 @@
           <a:bodyPr/>
           <a:lstStyle/>
           <a:p>
-            <a:fld id="{0BCC171E-E0C5-4CC6-9F71-807907E7C7A2}" type="slidenum">
+            <a:fld id="{BA9BFC98-BA7B-49EC-AA94-EA5D68368701}" type="slidenum">
               <a:rPr kumimoji="1" lang="ja-JP" altLang="en-US" smtClean="0"/>
               <a:t>‹#›</a:t>
             </a:fld>
@@ -2356,7 +2356,7 @@
     </p:spTree>
     <p:extLst>
       <p:ext uri="{BB962C8B-B14F-4D97-AF65-F5344CB8AC3E}">
-        <p14:creationId xmlns:p14="http://schemas.microsoft.com/office/powerpoint/2010/main" val="1699802946"/>
+        <p14:creationId xmlns:p14="http://schemas.microsoft.com/office/powerpoint/2010/main" val="1276626004"/>
       </p:ext>
     </p:extLst>
   </p:cSld>
@@ -2388,7 +2388,7 @@
           <p:cNvPr id="2" name="タイトル 1">
             <a:extLst>
               <a:ext uri="{FF2B5EF4-FFF2-40B4-BE49-F238E27FC236}">
-                <a16:creationId xmlns:a16="http://schemas.microsoft.com/office/drawing/2014/main" id="{CA87CF76-00B6-EAC4-A1B2-71DF8D0E05D5}"/>
+                <a16:creationId xmlns:a16="http://schemas.microsoft.com/office/drawing/2014/main" id="{84567CE5-CCE1-CD7F-3C35-13665DCFF779}"/>
               </a:ext>
             </a:extLst>
           </p:cNvPr>
@@ -2425,7 +2425,7 @@
           <p:cNvPr id="3" name="コンテンツ プレースホルダー 2">
             <a:extLst>
               <a:ext uri="{FF2B5EF4-FFF2-40B4-BE49-F238E27FC236}">
-                <a16:creationId xmlns:a16="http://schemas.microsoft.com/office/drawing/2014/main" id="{5734C140-C89F-DB58-7F6A-9C59E84C9B1B}"/>
+                <a16:creationId xmlns:a16="http://schemas.microsoft.com/office/drawing/2014/main" id="{414D0549-20B9-FA52-C8A1-EABFEF194B43}"/>
               </a:ext>
             </a:extLst>
           </p:cNvPr>
@@ -2547,7 +2547,7 @@
           <p:cNvPr id="4" name="テキスト プレースホルダー 3">
             <a:extLst>
               <a:ext uri="{FF2B5EF4-FFF2-40B4-BE49-F238E27FC236}">
-                <a16:creationId xmlns:a16="http://schemas.microsoft.com/office/drawing/2014/main" id="{32222661-B80A-0BB9-499B-3BA23BBA1976}"/>
+                <a16:creationId xmlns:a16="http://schemas.microsoft.com/office/drawing/2014/main" id="{19F300DF-ADAA-1DDC-D472-2FD210180D2C}"/>
               </a:ext>
             </a:extLst>
           </p:cNvPr>
@@ -2618,7 +2618,7 @@
           <p:cNvPr id="5" name="日付プレースホルダー 4">
             <a:extLst>
               <a:ext uri="{FF2B5EF4-FFF2-40B4-BE49-F238E27FC236}">
-                <a16:creationId xmlns:a16="http://schemas.microsoft.com/office/drawing/2014/main" id="{020FC044-38BE-B7F9-524F-CF313270BA36}"/>
+                <a16:creationId xmlns:a16="http://schemas.microsoft.com/office/drawing/2014/main" id="{87B67265-4461-D93F-A48A-31C38F573979}"/>
               </a:ext>
             </a:extLst>
           </p:cNvPr>
@@ -2634,7 +2634,7 @@
           <a:bodyPr/>
           <a:lstStyle/>
           <a:p>
-            <a:fld id="{D1E5438B-56ED-4DE5-B772-B2B57FD291AE}" type="datetimeFigureOut">
+            <a:fld id="{36C7B2FE-D70B-4BC5-9974-2C75A00ABC9C}" type="datetimeFigureOut">
               <a:rPr kumimoji="1" lang="ja-JP" altLang="en-US" smtClean="0"/>
               <a:t>2026/7/30</a:t>
             </a:fld>
@@ -2647,7 +2647,7 @@
           <p:cNvPr id="6" name="フッター プレースホルダー 5">
             <a:extLst>
               <a:ext uri="{FF2B5EF4-FFF2-40B4-BE49-F238E27FC236}">
-                <a16:creationId xmlns:a16="http://schemas.microsoft.com/office/drawing/2014/main" id="{010EFC70-3343-9278-BF87-FAF4B8A5CB40}"/>
+                <a16:creationId xmlns:a16="http://schemas.microsoft.com/office/drawing/2014/main" id="{B30AF533-0F14-786D-2FDF-CC5552B9545A}"/>
               </a:ext>
             </a:extLst>
           </p:cNvPr>
@@ -2672,7 +2672,7 @@
           <p:cNvPr id="7" name="スライド番号プレースホルダー 6">
             <a:extLst>
               <a:ext uri="{FF2B5EF4-FFF2-40B4-BE49-F238E27FC236}">
-                <a16:creationId xmlns:a16="http://schemas.microsoft.com/office/drawing/2014/main" id="{ACEC566D-4225-5C8C-1B1F-6B4473DDE19A}"/>
+                <a16:creationId xmlns:a16="http://schemas.microsoft.com/office/drawing/2014/main" id="{C16AE172-3C15-E921-01EA-A57DDD7EEF6E}"/>
               </a:ext>
             </a:extLst>
           </p:cNvPr>
@@ -2688,7 +2688,7 @@
           <a:bodyPr/>
           <a:lstStyle/>
           <a:p>
-            <a:fld id="{0BCC171E-E0C5-4CC6-9F71-807907E7C7A2}" type="slidenum">
+            <a:fld id="{BA9BFC98-BA7B-49EC-AA94-EA5D68368701}" type="slidenum">
               <a:rPr kumimoji="1" lang="ja-JP" altLang="en-US" smtClean="0"/>
               <a:t>‹#›</a:t>
             </a:fld>
@@ -2699,7 +2699,7 @@
     </p:spTree>
     <p:extLst>
       <p:ext uri="{BB962C8B-B14F-4D97-AF65-F5344CB8AC3E}">
-        <p14:creationId xmlns:p14="http://schemas.microsoft.com/office/powerpoint/2010/main" val="1107666944"/>
+        <p14:creationId xmlns:p14="http://schemas.microsoft.com/office/powerpoint/2010/main" val="3433895876"/>
       </p:ext>
     </p:extLst>
   </p:cSld>
@@ -2731,7 +2731,7 @@
           <p:cNvPr id="2" name="タイトル 1">
             <a:extLst>
               <a:ext uri="{FF2B5EF4-FFF2-40B4-BE49-F238E27FC236}">
-                <a16:creationId xmlns:a16="http://schemas.microsoft.com/office/drawing/2014/main" id="{64C629AA-C3CC-EFDC-F787-30CB94701C1F}"/>
+                <a16:creationId xmlns:a16="http://schemas.microsoft.com/office/drawing/2014/main" id="{0DEF7CEC-CAA7-2891-75A5-99777E26D1BA}"/>
               </a:ext>
             </a:extLst>
           </p:cNvPr>
@@ -2768,7 +2768,7 @@
           <p:cNvPr id="3" name="図プレースホルダー 2">
             <a:extLst>
               <a:ext uri="{FF2B5EF4-FFF2-40B4-BE49-F238E27FC236}">
-                <a16:creationId xmlns:a16="http://schemas.microsoft.com/office/drawing/2014/main" id="{CB5CA632-6E3A-2FFE-02D8-FDFE77324956}"/>
+                <a16:creationId xmlns:a16="http://schemas.microsoft.com/office/drawing/2014/main" id="{B662F4E0-A1FD-7664-9EF5-3EA382B4135C}"/>
               </a:ext>
             </a:extLst>
           </p:cNvPr>
@@ -2835,7 +2835,7 @@
           <p:cNvPr id="4" name="テキスト プレースホルダー 3">
             <a:extLst>
               <a:ext uri="{FF2B5EF4-FFF2-40B4-BE49-F238E27FC236}">
-                <a16:creationId xmlns:a16="http://schemas.microsoft.com/office/drawing/2014/main" id="{523A38ED-A008-9F0D-81E6-159EBBB26D3E}"/>
+                <a16:creationId xmlns:a16="http://schemas.microsoft.com/office/drawing/2014/main" id="{1B8168A5-BECA-8EAC-51E6-B97664B70CC6}"/>
               </a:ext>
             </a:extLst>
           </p:cNvPr>
@@ -2906,7 +2906,7 @@
           <p:cNvPr id="5" name="日付プレースホルダー 4">
             <a:extLst>
               <a:ext uri="{FF2B5EF4-FFF2-40B4-BE49-F238E27FC236}">
-                <a16:creationId xmlns:a16="http://schemas.microsoft.com/office/drawing/2014/main" id="{15914B20-0CF1-06BC-F73A-7F1A8A7E09F2}"/>
+                <a16:creationId xmlns:a16="http://schemas.microsoft.com/office/drawing/2014/main" id="{C2FB2F8D-2593-AA4A-B288-711FE6BF5DE9}"/>
               </a:ext>
             </a:extLst>
           </p:cNvPr>
@@ -2922,7 +2922,7 @@
           <a:bodyPr/>
           <a:lstStyle/>
           <a:p>
-            <a:fld id="{D1E5438B-56ED-4DE5-B772-B2B57FD291AE}" type="datetimeFigureOut">
+            <a:fld id="{36C7B2FE-D70B-4BC5-9974-2C75A00ABC9C}" type="datetimeFigureOut">
               <a:rPr kumimoji="1" lang="ja-JP" altLang="en-US" smtClean="0"/>
               <a:t>2026/7/30</a:t>
             </a:fld>
@@ -2935,7 +2935,7 @@
           <p:cNvPr id="6" name="フッター プレースホルダー 5">
             <a:extLst>
               <a:ext uri="{FF2B5EF4-FFF2-40B4-BE49-F238E27FC236}">
-                <a16:creationId xmlns:a16="http://schemas.microsoft.com/office/drawing/2014/main" id="{8FFA576F-963C-2979-560A-B9C8DDEE32FB}"/>
+                <a16:creationId xmlns:a16="http://schemas.microsoft.com/office/drawing/2014/main" id="{695ED12B-91EC-93DB-D269-9B00079E3C97}"/>
               </a:ext>
             </a:extLst>
           </p:cNvPr>
@@ -2960,7 +2960,7 @@
           <p:cNvPr id="7" name="スライド番号プレースホルダー 6">
             <a:extLst>
               <a:ext uri="{FF2B5EF4-FFF2-40B4-BE49-F238E27FC236}">
-                <a16:creationId xmlns:a16="http://schemas.microsoft.com/office/drawing/2014/main" id="{B8252516-667A-3750-1E92-C2218337E07B}"/>
+                <a16:creationId xmlns:a16="http://schemas.microsoft.com/office/drawing/2014/main" id="{D700AC63-D080-9D79-04AE-6DC5AD9F1EEF}"/>
               </a:ext>
             </a:extLst>
           </p:cNvPr>
@@ -2976,7 +2976,7 @@
           <a:bodyPr/>
           <a:lstStyle/>
           <a:p>
-            <a:fld id="{0BCC171E-E0C5-4CC6-9F71-807907E7C7A2}" type="slidenum">
+            <a:fld id="{BA9BFC98-BA7B-49EC-AA94-EA5D68368701}" type="slidenum">
               <a:rPr kumimoji="1" lang="ja-JP" altLang="en-US" smtClean="0"/>
               <a:t>‹#›</a:t>
             </a:fld>
@@ -2987,7 +2987,7 @@
     </p:spTree>
     <p:extLst>
       <p:ext uri="{BB962C8B-B14F-4D97-AF65-F5344CB8AC3E}">
-        <p14:creationId xmlns:p14="http://schemas.microsoft.com/office/powerpoint/2010/main" val="2140405890"/>
+        <p14:creationId xmlns:p14="http://schemas.microsoft.com/office/powerpoint/2010/main" val="1806121318"/>
       </p:ext>
     </p:extLst>
   </p:cSld>
@@ -3024,7 +3024,7 @@
           <p:cNvPr id="2" name="タイトル プレースホルダー 1">
             <a:extLst>
               <a:ext uri="{FF2B5EF4-FFF2-40B4-BE49-F238E27FC236}">
-                <a16:creationId xmlns:a16="http://schemas.microsoft.com/office/drawing/2014/main" id="{63D7BFCF-D396-67AA-CE4F-5213A95DFF8F}"/>
+                <a16:creationId xmlns:a16="http://schemas.microsoft.com/office/drawing/2014/main" id="{6484F285-6F78-69A0-D457-E9645AD2EA70}"/>
               </a:ext>
             </a:extLst>
           </p:cNvPr>
@@ -3062,7 +3062,7 @@
           <p:cNvPr id="3" name="テキスト プレースホルダー 2">
             <a:extLst>
               <a:ext uri="{FF2B5EF4-FFF2-40B4-BE49-F238E27FC236}">
-                <a16:creationId xmlns:a16="http://schemas.microsoft.com/office/drawing/2014/main" id="{AF248148-00A3-8757-4E34-BA59DF0A5217}"/>
+                <a16:creationId xmlns:a16="http://schemas.microsoft.com/office/drawing/2014/main" id="{1949485B-1E39-EF8A-96E1-3DF2597516CA}"/>
               </a:ext>
             </a:extLst>
           </p:cNvPr>
@@ -3161,7 +3161,7 @@
           <p:cNvPr id="4" name="日付プレースホルダー 3">
             <a:extLst>
               <a:ext uri="{FF2B5EF4-FFF2-40B4-BE49-F238E27FC236}">
-                <a16:creationId xmlns:a16="http://schemas.microsoft.com/office/drawing/2014/main" id="{07973E61-DBB9-B4FE-F162-4C601B19DCF5}"/>
+                <a16:creationId xmlns:a16="http://schemas.microsoft.com/office/drawing/2014/main" id="{AE63C89E-D142-ABC0-9FFB-13A884F9A6A0}"/>
               </a:ext>
             </a:extLst>
           </p:cNvPr>
@@ -3195,7 +3195,7 @@
             </a:lvl1pPr>
           </a:lstStyle>
           <a:p>
-            <a:fld id="{D1E5438B-56ED-4DE5-B772-B2B57FD291AE}" type="datetimeFigureOut">
+            <a:fld id="{36C7B2FE-D70B-4BC5-9974-2C75A00ABC9C}" type="datetimeFigureOut">
               <a:rPr kumimoji="1" lang="ja-JP" altLang="en-US" smtClean="0"/>
               <a:t>2026/7/30</a:t>
             </a:fld>
@@ -3208,7 +3208,7 @@
           <p:cNvPr id="5" name="フッター プレースホルダー 4">
             <a:extLst>
               <a:ext uri="{FF2B5EF4-FFF2-40B4-BE49-F238E27FC236}">
-                <a16:creationId xmlns:a16="http://schemas.microsoft.com/office/drawing/2014/main" id="{75A2E70F-3253-CD77-192E-D59E558A5382}"/>
+                <a16:creationId xmlns:a16="http://schemas.microsoft.com/office/drawing/2014/main" id="{81709576-AA75-9202-1726-E71D3BCF2998}"/>
               </a:ext>
             </a:extLst>
           </p:cNvPr>
@@ -3251,7 +3251,7 @@
           <p:cNvPr id="6" name="スライド番号プレースホルダー 5">
             <a:extLst>
               <a:ext uri="{FF2B5EF4-FFF2-40B4-BE49-F238E27FC236}">
-                <a16:creationId xmlns:a16="http://schemas.microsoft.com/office/drawing/2014/main" id="{AC76B8B8-C8D4-0DD1-61F9-C2BDD3C0F6BE}"/>
+                <a16:creationId xmlns:a16="http://schemas.microsoft.com/office/drawing/2014/main" id="{5BC1FFDA-0CD5-AE21-59B3-F3EF9B3926F2}"/>
               </a:ext>
             </a:extLst>
           </p:cNvPr>
@@ -3285,7 +3285,7 @@
             </a:lvl1pPr>
           </a:lstStyle>
           <a:p>
-            <a:fld id="{0BCC171E-E0C5-4CC6-9F71-807907E7C7A2}" type="slidenum">
+            <a:fld id="{BA9BFC98-BA7B-49EC-AA94-EA5D68368701}" type="slidenum">
               <a:rPr kumimoji="1" lang="ja-JP" altLang="en-US" smtClean="0"/>
               <a:t>‹#›</a:t>
             </a:fld>
@@ -3296,7 +3296,7 @@
     </p:spTree>
     <p:extLst>
       <p:ext uri="{BB962C8B-B14F-4D97-AF65-F5344CB8AC3E}">
-        <p14:creationId xmlns:p14="http://schemas.microsoft.com/office/powerpoint/2010/main" val="888085231"/>
+        <p14:creationId xmlns:p14="http://schemas.microsoft.com/office/powerpoint/2010/main" val="724753727"/>
       </p:ext>
     </p:extLst>
   </p:cSld>
@@ -3619,7 +3619,7 @@
           <p:cNvPr id="2" name="テキスト ボックス 1">
             <a:extLst>
               <a:ext uri="{FF2B5EF4-FFF2-40B4-BE49-F238E27FC236}">
-                <a16:creationId xmlns:a16="http://schemas.microsoft.com/office/drawing/2014/main" id="{25DAC1EE-2080-CF50-DF85-D5391DBC60A9}"/>
+                <a16:creationId xmlns:a16="http://schemas.microsoft.com/office/drawing/2014/main" id="{1FB2735C-B507-3391-009C-E635E3F01A76}"/>
               </a:ext>
             </a:extLst>
           </p:cNvPr>
@@ -3665,7 +3665,7 @@
           <p:cNvPr id="3" name="テキスト ボックス 2">
             <a:extLst>
               <a:ext uri="{FF2B5EF4-FFF2-40B4-BE49-F238E27FC236}">
-                <a16:creationId xmlns:a16="http://schemas.microsoft.com/office/drawing/2014/main" id="{D6BA4CCF-461F-C071-62C4-38A86F2F8B92}"/>
+                <a16:creationId xmlns:a16="http://schemas.microsoft.com/office/drawing/2014/main" id="{0073C17F-9860-CC12-BAD8-87F3049E5A88}"/>
               </a:ext>
             </a:extLst>
           </p:cNvPr>
@@ -3714,7 +3714,7 @@
           <p:cNvPr id="4" name="テキスト ボックス 3">
             <a:extLst>
               <a:ext uri="{FF2B5EF4-FFF2-40B4-BE49-F238E27FC236}">
-                <a16:creationId xmlns:a16="http://schemas.microsoft.com/office/drawing/2014/main" id="{F442B89B-88CB-2AA8-A756-429592E20C95}"/>
+                <a16:creationId xmlns:a16="http://schemas.microsoft.com/office/drawing/2014/main" id="{398213D5-9A2B-5884-673B-74F6D86D5E6E}"/>
               </a:ext>
             </a:extLst>
           </p:cNvPr>
@@ -3754,7 +3754,7 @@
           <p:cNvPr id="5" name="テキスト ボックス 4">
             <a:extLst>
               <a:ext uri="{FF2B5EF4-FFF2-40B4-BE49-F238E27FC236}">
-                <a16:creationId xmlns:a16="http://schemas.microsoft.com/office/drawing/2014/main" id="{ACF5B0D1-3576-79A1-9CC5-14164F3D0D2D}"/>
+                <a16:creationId xmlns:a16="http://schemas.microsoft.com/office/drawing/2014/main" id="{CF3ED49A-49A7-3A05-6419-31CC6EAD50F6}"/>
               </a:ext>
             </a:extLst>
           </p:cNvPr>
@@ -3801,7 +3801,7 @@
             <a:hlinkClick r:id="" action="ppaction://media"/>
             <a:extLst>
               <a:ext uri="{FF2B5EF4-FFF2-40B4-BE49-F238E27FC236}">
-                <a16:creationId xmlns:a16="http://schemas.microsoft.com/office/drawing/2014/main" id="{FF5BEB82-B5E9-68E0-8C55-ADD217D75291}"/>
+                <a16:creationId xmlns:a16="http://schemas.microsoft.com/office/drawing/2014/main" id="{DD98AE6E-C365-509D-720A-879DB3C64CCC}"/>
               </a:ext>
             </a:extLst>
           </p:cNvPr>
@@ -3836,7 +3836,7 @@
     </p:spTree>
     <p:extLst>
       <p:ext uri="{BB962C8B-B14F-4D97-AF65-F5344CB8AC3E}">
-        <p14:creationId xmlns:p14="http://schemas.microsoft.com/office/powerpoint/2010/main" val="3281636784"/>
+        <p14:creationId xmlns:p14="http://schemas.microsoft.com/office/powerpoint/2010/main" val="3169596204"/>
       </p:ext>
     </p:extLst>
   </p:cSld>
@@ -3960,7 +3960,7 @@
           <p:cNvPr id="2" name="テキスト ボックス 1">
             <a:extLst>
               <a:ext uri="{FF2B5EF4-FFF2-40B4-BE49-F238E27FC236}">
-                <a16:creationId xmlns:a16="http://schemas.microsoft.com/office/drawing/2014/main" id="{14DB9D31-92A3-6385-DC11-7BF6A88467DE}"/>
+                <a16:creationId xmlns:a16="http://schemas.microsoft.com/office/drawing/2014/main" id="{629DAB27-FC37-6915-9E5C-6AE81EB77992}"/>
               </a:ext>
             </a:extLst>
           </p:cNvPr>
@@ -4006,7 +4006,7 @@
           <p:cNvPr id="3" name="テキスト ボックス 2">
             <a:extLst>
               <a:ext uri="{FF2B5EF4-FFF2-40B4-BE49-F238E27FC236}">
-                <a16:creationId xmlns:a16="http://schemas.microsoft.com/office/drawing/2014/main" id="{2383914D-3572-3B7E-AD90-049D0B87E343}"/>
+                <a16:creationId xmlns:a16="http://schemas.microsoft.com/office/drawing/2014/main" id="{FEBBABEE-F3F4-37C6-3336-AE07FF32DD3E}"/>
               </a:ext>
             </a:extLst>
           </p:cNvPr>
@@ -4046,7 +4046,7 @@
           <p:cNvPr id="4" name="テキスト ボックス 3">
             <a:extLst>
               <a:ext uri="{FF2B5EF4-FFF2-40B4-BE49-F238E27FC236}">
-                <a16:creationId xmlns:a16="http://schemas.microsoft.com/office/drawing/2014/main" id="{2C8542F7-1EDD-990F-23DA-2E8119FA6767}"/>
+                <a16:creationId xmlns:a16="http://schemas.microsoft.com/office/drawing/2014/main" id="{15A6C198-F846-FAE9-311D-D9995638446D}"/>
               </a:ext>
             </a:extLst>
           </p:cNvPr>
@@ -4110,7 +4110,7 @@
           <p:cNvPr id="5" name="テキスト ボックス 4">
             <a:extLst>
               <a:ext uri="{FF2B5EF4-FFF2-40B4-BE49-F238E27FC236}">
-                <a16:creationId xmlns:a16="http://schemas.microsoft.com/office/drawing/2014/main" id="{F3243A13-28E0-B0BC-40A9-5D9E848D57FD}"/>
+                <a16:creationId xmlns:a16="http://schemas.microsoft.com/office/drawing/2014/main" id="{A0AB08AE-7ED3-A750-F1A4-133337FB07AD}"/>
               </a:ext>
             </a:extLst>
           </p:cNvPr>
@@ -4157,7 +4157,7 @@
             <a:hlinkClick r:id="" action="ppaction://media"/>
             <a:extLst>
               <a:ext uri="{FF2B5EF4-FFF2-40B4-BE49-F238E27FC236}">
-                <a16:creationId xmlns:a16="http://schemas.microsoft.com/office/drawing/2014/main" id="{6674A838-1441-075C-9FBD-FEE37494B7A1}"/>
+                <a16:creationId xmlns:a16="http://schemas.microsoft.com/office/drawing/2014/main" id="{7AD3D20C-F6BB-0673-FDE8-848D468CE769}"/>
               </a:ext>
             </a:extLst>
           </p:cNvPr>
@@ -4192,7 +4192,7 @@
     </p:spTree>
     <p:extLst>
       <p:ext uri="{BB962C8B-B14F-4D97-AF65-F5344CB8AC3E}">
-        <p14:creationId xmlns:p14="http://schemas.microsoft.com/office/powerpoint/2010/main" val="2575704910"/>
+        <p14:creationId xmlns:p14="http://schemas.microsoft.com/office/powerpoint/2010/main" val="3623407337"/>
       </p:ext>
     </p:extLst>
   </p:cSld>
@@ -4316,7 +4316,7 @@
           <p:cNvPr id="2" name="テキスト ボックス 1">
             <a:extLst>
               <a:ext uri="{FF2B5EF4-FFF2-40B4-BE49-F238E27FC236}">
-                <a16:creationId xmlns:a16="http://schemas.microsoft.com/office/drawing/2014/main" id="{CC3AE8CA-518F-383D-6EB3-331A85CEA517}"/>
+                <a16:creationId xmlns:a16="http://schemas.microsoft.com/office/drawing/2014/main" id="{F90C934A-18AF-0330-3BF2-DDA33E4447A3}"/>
               </a:ext>
             </a:extLst>
           </p:cNvPr>
@@ -4362,7 +4362,7 @@
           <p:cNvPr id="3" name="テキスト ボックス 2">
             <a:extLst>
               <a:ext uri="{FF2B5EF4-FFF2-40B4-BE49-F238E27FC236}">
-                <a16:creationId xmlns:a16="http://schemas.microsoft.com/office/drawing/2014/main" id="{B17DE69C-B8A8-BA47-2CF0-31D2511B7F0A}"/>
+                <a16:creationId xmlns:a16="http://schemas.microsoft.com/office/drawing/2014/main" id="{1F0B05BC-AAB5-8209-069F-CC69E10D6868}"/>
               </a:ext>
             </a:extLst>
           </p:cNvPr>
@@ -4402,7 +4402,7 @@
           <p:cNvPr id="4" name="テキスト ボックス 3">
             <a:extLst>
               <a:ext uri="{FF2B5EF4-FFF2-40B4-BE49-F238E27FC236}">
-                <a16:creationId xmlns:a16="http://schemas.microsoft.com/office/drawing/2014/main" id="{2F0C171F-F685-4EB1-20F5-05C6C16236E7}"/>
+                <a16:creationId xmlns:a16="http://schemas.microsoft.com/office/drawing/2014/main" id="{3D5ACA97-5944-3AD1-EE87-F612E4ACBA1F}"/>
               </a:ext>
             </a:extLst>
           </p:cNvPr>
@@ -4497,7 +4497,7 @@
           <p:cNvPr id="5" name="テキスト ボックス 4">
             <a:extLst>
               <a:ext uri="{FF2B5EF4-FFF2-40B4-BE49-F238E27FC236}">
-                <a16:creationId xmlns:a16="http://schemas.microsoft.com/office/drawing/2014/main" id="{2D18E3B8-FAD8-3FE7-990F-5FE14CD58977}"/>
+                <a16:creationId xmlns:a16="http://schemas.microsoft.com/office/drawing/2014/main" id="{32FF65F7-E0FD-B69D-4004-8B47ACAE3331}"/>
               </a:ext>
             </a:extLst>
           </p:cNvPr>
@@ -4544,7 +4544,7 @@
             <a:hlinkClick r:id="" action="ppaction://media"/>
             <a:extLst>
               <a:ext uri="{FF2B5EF4-FFF2-40B4-BE49-F238E27FC236}">
-                <a16:creationId xmlns:a16="http://schemas.microsoft.com/office/drawing/2014/main" id="{DE3C556A-4CA8-FF0B-C6C2-B1AEE0D2DA28}"/>
+                <a16:creationId xmlns:a16="http://schemas.microsoft.com/office/drawing/2014/main" id="{56BBC73A-8713-04D2-13B9-F4621368CA49}"/>
               </a:ext>
             </a:extLst>
           </p:cNvPr>
@@ -4579,7 +4579,7 @@
     </p:spTree>
     <p:extLst>
       <p:ext uri="{BB962C8B-B14F-4D97-AF65-F5344CB8AC3E}">
-        <p14:creationId xmlns:p14="http://schemas.microsoft.com/office/powerpoint/2010/main" val="2924973270"/>
+        <p14:creationId xmlns:p14="http://schemas.microsoft.com/office/powerpoint/2010/main" val="1201991578"/>
       </p:ext>
     </p:extLst>
   </p:cSld>
@@ -4703,7 +4703,7 @@
           <p:cNvPr id="2" name="テキスト ボックス 1">
             <a:extLst>
               <a:ext uri="{FF2B5EF4-FFF2-40B4-BE49-F238E27FC236}">
-                <a16:creationId xmlns:a16="http://schemas.microsoft.com/office/drawing/2014/main" id="{719165EE-5393-CB18-145D-3E7253719710}"/>
+                <a16:creationId xmlns:a16="http://schemas.microsoft.com/office/drawing/2014/main" id="{4381F9F9-0015-1F59-1A36-E23F056ABBB4}"/>
               </a:ext>
             </a:extLst>
           </p:cNvPr>
@@ -4749,7 +4749,7 @@
           <p:cNvPr id="3" name="テキスト ボックス 2">
             <a:extLst>
               <a:ext uri="{FF2B5EF4-FFF2-40B4-BE49-F238E27FC236}">
-                <a16:creationId xmlns:a16="http://schemas.microsoft.com/office/drawing/2014/main" id="{57967267-2A9D-5D2A-4512-5199A89E0B94}"/>
+                <a16:creationId xmlns:a16="http://schemas.microsoft.com/office/drawing/2014/main" id="{E692119C-5154-3A63-AC5A-0341B63FFE4F}"/>
               </a:ext>
             </a:extLst>
           </p:cNvPr>
@@ -4789,7 +4789,7 @@
           <p:cNvPr id="4" name="テキスト ボックス 3">
             <a:extLst>
               <a:ext uri="{FF2B5EF4-FFF2-40B4-BE49-F238E27FC236}">
-                <a16:creationId xmlns:a16="http://schemas.microsoft.com/office/drawing/2014/main" id="{EFC09FDD-A4CA-B78E-01FE-2F21966633C6}"/>
+                <a16:creationId xmlns:a16="http://schemas.microsoft.com/office/drawing/2014/main" id="{8F9416AF-81F4-D554-185D-A73595B2BDB5}"/>
               </a:ext>
             </a:extLst>
           </p:cNvPr>
@@ -4899,7 +4899,7 @@
           <p:cNvPr id="5" name="テキスト ボックス 4">
             <a:extLst>
               <a:ext uri="{FF2B5EF4-FFF2-40B4-BE49-F238E27FC236}">
-                <a16:creationId xmlns:a16="http://schemas.microsoft.com/office/drawing/2014/main" id="{7D57F52F-CA2A-A0A1-25D2-07AA1C8A3AD0}"/>
+                <a16:creationId xmlns:a16="http://schemas.microsoft.com/office/drawing/2014/main" id="{ADB75BD9-A12A-A871-194E-7660B92DE2C7}"/>
               </a:ext>
             </a:extLst>
           </p:cNvPr>
@@ -4946,7 +4946,7 @@
             <a:hlinkClick r:id="" action="ppaction://media"/>
             <a:extLst>
               <a:ext uri="{FF2B5EF4-FFF2-40B4-BE49-F238E27FC236}">
-                <a16:creationId xmlns:a16="http://schemas.microsoft.com/office/drawing/2014/main" id="{16137522-2667-8642-24E9-D059D9C70DFC}"/>
+                <a16:creationId xmlns:a16="http://schemas.microsoft.com/office/drawing/2014/main" id="{89AD8BB5-AF90-CB2C-F423-629C8F89EFE0}"/>
               </a:ext>
             </a:extLst>
           </p:cNvPr>
@@ -4981,7 +4981,7 @@
     </p:spTree>
     <p:extLst>
       <p:ext uri="{BB962C8B-B14F-4D97-AF65-F5344CB8AC3E}">
-        <p14:creationId xmlns:p14="http://schemas.microsoft.com/office/powerpoint/2010/main" val="3371420235"/>
+        <p14:creationId xmlns:p14="http://schemas.microsoft.com/office/powerpoint/2010/main" val="4067212079"/>
       </p:ext>
     </p:extLst>
   </p:cSld>
@@ -5105,7 +5105,7 @@
           <p:cNvPr id="2" name="テキスト ボックス 1">
             <a:extLst>
               <a:ext uri="{FF2B5EF4-FFF2-40B4-BE49-F238E27FC236}">
-                <a16:creationId xmlns:a16="http://schemas.microsoft.com/office/drawing/2014/main" id="{7F31F5E5-A805-E2D7-63F6-AEFB910CA187}"/>
+                <a16:creationId xmlns:a16="http://schemas.microsoft.com/office/drawing/2014/main" id="{4E01FC72-B4CC-AA4D-D5A2-324E454B1FAB}"/>
               </a:ext>
             </a:extLst>
           </p:cNvPr>
@@ -5151,7 +5151,7 @@
           <p:cNvPr id="3" name="テキスト ボックス 2">
             <a:extLst>
               <a:ext uri="{FF2B5EF4-FFF2-40B4-BE49-F238E27FC236}">
-                <a16:creationId xmlns:a16="http://schemas.microsoft.com/office/drawing/2014/main" id="{CCD6CD0C-A1AD-5CC5-321D-5548A56A7C46}"/>
+                <a16:creationId xmlns:a16="http://schemas.microsoft.com/office/drawing/2014/main" id="{5B95B361-3AAE-F0EC-5BF3-699D7FF94FFE}"/>
               </a:ext>
             </a:extLst>
           </p:cNvPr>
@@ -5191,7 +5191,7 @@
           <p:cNvPr id="4" name="テキスト ボックス 3">
             <a:extLst>
               <a:ext uri="{FF2B5EF4-FFF2-40B4-BE49-F238E27FC236}">
-                <a16:creationId xmlns:a16="http://schemas.microsoft.com/office/drawing/2014/main" id="{7B5858D2-8768-A45C-52E8-851D8343C1BB}"/>
+                <a16:creationId xmlns:a16="http://schemas.microsoft.com/office/drawing/2014/main" id="{84B552CE-A08A-24EC-C7C2-012C95E2C7FE}"/>
               </a:ext>
             </a:extLst>
           </p:cNvPr>
@@ -5215,20 +5215,14 @@
           <a:lstStyle/>
           <a:p>
             <a:r>
-              <a:rPr kumimoji="1" lang="en-US" altLang="ja-JP" sz="2000">
+              <a:rPr kumimoji="1" lang="ja-JP" altLang="en-US" sz="2000">
                 <a:solidFill>
                   <a:srgbClr val="333333"/>
                 </a:solidFill>
                 <a:latin typeface="Arial" panose="020B0604020202020204" pitchFamily="34" charset="0"/>
               </a:rPr>
-              <a:t>Set confirmed custom domain</a:t>
-            </a:r>
-            <a:endParaRPr kumimoji="1" lang="ja-JP" altLang="en-US" sz="2000">
-              <a:solidFill>
-                <a:srgbClr val="333333"/>
-              </a:solidFill>
-              <a:latin typeface="Arial" panose="020B0604020202020204" pitchFamily="34" charset="0"/>
-            </a:endParaRPr>
+              <a:t>直近のコミットでは、実装の見直しと継続的な改善が行われました。</a:t>
+            </a:r>
           </a:p>
         </p:txBody>
       </p:sp>
@@ -5237,7 +5231,7 @@
           <p:cNvPr id="5" name="テキスト ボックス 4">
             <a:extLst>
               <a:ext uri="{FF2B5EF4-FFF2-40B4-BE49-F238E27FC236}">
-                <a16:creationId xmlns:a16="http://schemas.microsoft.com/office/drawing/2014/main" id="{E37E50CF-71AA-BD6D-3B8C-D15315EEB5AE}"/>
+                <a16:creationId xmlns:a16="http://schemas.microsoft.com/office/drawing/2014/main" id="{F877A949-5B25-6F7F-D951-D01DA61EC756}"/>
               </a:ext>
             </a:extLst>
           </p:cNvPr>
@@ -5284,7 +5278,7 @@
             <a:hlinkClick r:id="" action="ppaction://media"/>
             <a:extLst>
               <a:ext uri="{FF2B5EF4-FFF2-40B4-BE49-F238E27FC236}">
-                <a16:creationId xmlns:a16="http://schemas.microsoft.com/office/drawing/2014/main" id="{0C5651BA-DF17-5814-CBA8-C695A1E31AF0}"/>
+                <a16:creationId xmlns:a16="http://schemas.microsoft.com/office/drawing/2014/main" id="{991E2329-3BB6-D088-E252-CB8670D35E61}"/>
               </a:ext>
             </a:extLst>
           </p:cNvPr>
@@ -5319,7 +5313,7 @@
     </p:spTree>
     <p:extLst>
       <p:ext uri="{BB962C8B-B14F-4D97-AF65-F5344CB8AC3E}">
-        <p14:creationId xmlns:p14="http://schemas.microsoft.com/office/powerpoint/2010/main" val="4243738447"/>
+        <p14:creationId xmlns:p14="http://schemas.microsoft.com/office/powerpoint/2010/main" val="3453857587"/>
       </p:ext>
     </p:extLst>
   </p:cSld>
@@ -5362,7 +5356,7 @@
                                   <p:childTnLst>
                                     <p:cmd type="call" cmd="playFrom(0.0)">
                                       <p:cBhvr>
-                                        <p:cTn id="6" dur="6451" fill="hold"/>
+                                        <p:cTn id="6" dur="6076" fill="hold"/>
                                         <p:tgtEl>
                                           <p:spTgt spid="6"/>
                                         </p:tgtEl>
@@ -5443,7 +5437,7 @@
           <p:cNvPr id="2" name="テキスト ボックス 1">
             <a:extLst>
               <a:ext uri="{FF2B5EF4-FFF2-40B4-BE49-F238E27FC236}">
-                <a16:creationId xmlns:a16="http://schemas.microsoft.com/office/drawing/2014/main" id="{66BA0D11-9747-E449-790C-2FB21EA08E53}"/>
+                <a16:creationId xmlns:a16="http://schemas.microsoft.com/office/drawing/2014/main" id="{5C50F6DC-C6E3-8470-7C56-53F22C655402}"/>
               </a:ext>
             </a:extLst>
           </p:cNvPr>
@@ -5489,7 +5483,7 @@
           <p:cNvPr id="3" name="テキスト ボックス 2">
             <a:extLst>
               <a:ext uri="{FF2B5EF4-FFF2-40B4-BE49-F238E27FC236}">
-                <a16:creationId xmlns:a16="http://schemas.microsoft.com/office/drawing/2014/main" id="{6B440414-D386-51D2-3A12-CC35F00385A9}"/>
+                <a16:creationId xmlns:a16="http://schemas.microsoft.com/office/drawing/2014/main" id="{D59E3B30-88AC-5C7F-2F15-AEA19CE53AEC}"/>
               </a:ext>
             </a:extLst>
           </p:cNvPr>
@@ -5529,7 +5523,7 @@
           <p:cNvPr id="4" name="テキスト ボックス 3">
             <a:extLst>
               <a:ext uri="{FF2B5EF4-FFF2-40B4-BE49-F238E27FC236}">
-                <a16:creationId xmlns:a16="http://schemas.microsoft.com/office/drawing/2014/main" id="{69A202B9-A692-4596-AD0E-F04D6D2AA365}"/>
+                <a16:creationId xmlns:a16="http://schemas.microsoft.com/office/drawing/2014/main" id="{1C50CE93-28EC-549F-17F1-22C0389FC79E}"/>
               </a:ext>
             </a:extLst>
           </p:cNvPr>
@@ -5594,7 +5588,7 @@
           <p:cNvPr id="5" name="テキスト ボックス 4">
             <a:extLst>
               <a:ext uri="{FF2B5EF4-FFF2-40B4-BE49-F238E27FC236}">
-                <a16:creationId xmlns:a16="http://schemas.microsoft.com/office/drawing/2014/main" id="{D7EA2535-AE6D-6756-6FC3-A8EB9E973769}"/>
+                <a16:creationId xmlns:a16="http://schemas.microsoft.com/office/drawing/2014/main" id="{26135EDD-A045-2B0D-C5D2-3DC43535F394}"/>
               </a:ext>
             </a:extLst>
           </p:cNvPr>
@@ -5641,7 +5635,7 @@
             <a:hlinkClick r:id="" action="ppaction://media"/>
             <a:extLst>
               <a:ext uri="{FF2B5EF4-FFF2-40B4-BE49-F238E27FC236}">
-                <a16:creationId xmlns:a16="http://schemas.microsoft.com/office/drawing/2014/main" id="{28108B9D-64F3-6DCE-4F15-6852377210A9}"/>
+                <a16:creationId xmlns:a16="http://schemas.microsoft.com/office/drawing/2014/main" id="{53BB3465-C1F7-679C-BA87-EBDE0EC69A63}"/>
               </a:ext>
             </a:extLst>
           </p:cNvPr>
@@ -5676,7 +5670,7 @@
     </p:spTree>
     <p:extLst>
       <p:ext uri="{BB962C8B-B14F-4D97-AF65-F5344CB8AC3E}">
-        <p14:creationId xmlns:p14="http://schemas.microsoft.com/office/powerpoint/2010/main" val="814832047"/>
+        <p14:creationId xmlns:p14="http://schemas.microsoft.com/office/powerpoint/2010/main" val="1242266147"/>
       </p:ext>
     </p:extLst>
   </p:cSld>
